--- a/back/test_output/test_doc.pptx
+++ b/back/test_output/test_doc.pptx
@@ -5463,7 +5463,7 @@
                 <a:solidFill>
                   <a:srgbClr val="718096"/>
                 </a:solidFill>
-                <a:latin typeface="Georgia"/>
+                <a:latin typeface="Arial"/>
               </a:defRPr>
             </a:pPr>
             <a:r>
